--- a/Presentation.pptx
+++ b/Presentation.pptx
@@ -13,9 +13,11 @@
     <p:sldId id="261" r:id="rId7"/>
     <p:sldId id="262" r:id="rId8"/>
     <p:sldId id="263" r:id="rId9"/>
-    <p:sldId id="264" r:id="rId10"/>
-    <p:sldId id="265" r:id="rId11"/>
-    <p:sldId id="266" r:id="rId12"/>
+    <p:sldId id="267" r:id="rId10"/>
+    <p:sldId id="268" r:id="rId11"/>
+    <p:sldId id="264" r:id="rId12"/>
+    <p:sldId id="265" r:id="rId13"/>
+    <p:sldId id="266" r:id="rId14"/>
   </p:sldIdLst>
   <p:sldSz cx="12192000" cy="6858000"/>
   <p:notesSz cx="6858000" cy="9144000"/>
@@ -3180,7 +3182,7 @@
               </a:spcAft>
             </a:pPr>
             <a:r>
-              <a:rPr sz="3000" b="1">
+              <a:rPr sz="3000" b="1" dirty="0">
                 <a:solidFill>
                   <a:srgbClr val="FFFFFF"/>
                 </a:solidFill>
@@ -3429,6 +3431,66 @@
 </file>
 
 <file path=ppt/slides/slide10.xml><?xml version="1.0" encoding="utf-8"?>
+<p:sld xmlns:a="http://schemas.openxmlformats.org/drawingml/2006/main" xmlns:r="http://schemas.openxmlformats.org/officeDocument/2006/relationships" xmlns:p="http://schemas.openxmlformats.org/presentationml/2006/main">
+  <p:cSld>
+    <p:spTree>
+      <p:nvGrpSpPr>
+        <p:cNvPr id="1" name=""/>
+        <p:cNvGrpSpPr/>
+        <p:nvPr/>
+      </p:nvGrpSpPr>
+      <p:grpSpPr>
+        <a:xfrm>
+          <a:off x="0" y="0"/>
+          <a:ext cx="0" cy="0"/>
+          <a:chOff x="0" y="0"/>
+          <a:chExt cx="0" cy="0"/>
+        </a:xfrm>
+      </p:grpSpPr>
+      <p:pic>
+        <p:nvPicPr>
+          <p:cNvPr id="3" name="Picture 2">
+            <a:extLst>
+              <a:ext uri="{FF2B5EF4-FFF2-40B4-BE49-F238E27FC236}">
+                <a16:creationId xmlns:a16="http://schemas.microsoft.com/office/drawing/2014/main" id="{0612AFB5-421B-98CA-BDC7-1BA075361D4F}"/>
+              </a:ext>
+            </a:extLst>
+          </p:cNvPr>
+          <p:cNvPicPr>
+            <a:picLocks noChangeAspect="1"/>
+          </p:cNvPicPr>
+          <p:nvPr/>
+        </p:nvPicPr>
+        <p:blipFill>
+          <a:blip r:embed="rId2"/>
+          <a:stretch>
+            <a:fillRect/>
+          </a:stretch>
+        </p:blipFill>
+        <p:spPr>
+          <a:xfrm>
+            <a:off x="2330998" y="410528"/>
+            <a:ext cx="7714579" cy="6036943"/>
+          </a:xfrm>
+          <a:prstGeom prst="rect">
+            <a:avLst/>
+          </a:prstGeom>
+        </p:spPr>
+      </p:pic>
+    </p:spTree>
+    <p:extLst>
+      <p:ext uri="{BB962C8B-B14F-4D97-AF65-F5344CB8AC3E}">
+        <p14:creationId xmlns:p14="http://schemas.microsoft.com/office/powerpoint/2010/main" val="1720532547"/>
+      </p:ext>
+    </p:extLst>
+  </p:cSld>
+  <p:clrMapOvr>
+    <a:masterClrMapping/>
+  </p:clrMapOvr>
+</p:sld>
+</file>
+
+<file path=ppt/slides/slide11.xml><?xml version="1.0" encoding="utf-8"?>
 <p:sld xmlns:a="http://schemas.openxmlformats.org/drawingml/2006/main" xmlns:r="http://schemas.openxmlformats.org/officeDocument/2006/relationships" xmlns:p="http://schemas.openxmlformats.org/presentationml/2006/main">
   <p:cSld>
     <p:bg>
@@ -3487,7 +3549,7 @@
                 </a:solidFill>
                 <a:latin typeface="Aptos"/>
               </a:rPr>
-              <a:t>Conclusion, Limitations &amp; Future Work</a:t>
+              <a:t>Final Test Predictions</a:t>
             </a:r>
           </a:p>
         </p:txBody>
@@ -3526,21 +3588,67 @@
                 </a:solidFill>
                 <a:latin typeface="Aptos"/>
               </a:rPr>
-              <a:t>What the experiments show and what could be improved.</a:t>
-            </a:r>
-          </a:p>
-        </p:txBody>
-      </p:sp>
-      <p:sp>
-        <p:nvSpPr>
-          <p:cNvPr id="4" name="TextBox 3"/>
-          <p:cNvSpPr txBox="1"/>
-          <p:nvPr/>
-        </p:nvSpPr>
-        <p:spPr>
-          <a:xfrm>
-            <a:off x="822960" y="1417320"/>
-            <a:ext cx="4937760" cy="365760"/>
+              <a:t>Prediction export completed using the fitted baseline Random Forest.</a:t>
+            </a:r>
+          </a:p>
+        </p:txBody>
+      </p:sp>
+      <p:sp>
+        <p:nvSpPr>
+          <p:cNvPr id="4" name="Rounded Rectangle 3"/>
+          <p:cNvSpPr/>
+          <p:nvPr/>
+        </p:nvSpPr>
+        <p:spPr>
+          <a:xfrm>
+            <a:off x="914400" y="1463040"/>
+            <a:ext cx="2926080" cy="1325880"/>
+          </a:xfrm>
+          <a:prstGeom prst="roundRect">
+            <a:avLst/>
+          </a:prstGeom>
+          <a:solidFill>
+            <a:srgbClr val="EEF4F9"/>
+          </a:solidFill>
+          <a:ln>
+            <a:solidFill>
+              <a:srgbClr val="1F8784"/>
+            </a:solidFill>
+          </a:ln>
+        </p:spPr>
+        <p:style>
+          <a:lnRef idx="1">
+            <a:schemeClr val="accent1"/>
+          </a:lnRef>
+          <a:fillRef idx="3">
+            <a:schemeClr val="accent1"/>
+          </a:fillRef>
+          <a:effectRef idx="2">
+            <a:schemeClr val="accent1"/>
+          </a:effectRef>
+          <a:fontRef idx="minor">
+            <a:schemeClr val="lt1"/>
+          </a:fontRef>
+        </p:style>
+        <p:txBody>
+          <a:bodyPr rtlCol="0" anchor="ctr"/>
+          <a:lstStyle/>
+          <a:p>
+            <a:pPr algn="ctr"/>
+            <a:endParaRPr/>
+          </a:p>
+        </p:txBody>
+      </p:sp>
+      <p:sp>
+        <p:nvSpPr>
+          <p:cNvPr id="5" name="TextBox 4"/>
+          <p:cNvSpPr txBox="1"/>
+          <p:nvPr/>
+        </p:nvSpPr>
+        <p:spPr>
+          <a:xfrm>
+            <a:off x="1024128" y="1554480"/>
+            <a:ext cx="2706624" cy="438912"/>
           </a:xfrm>
           <a:prstGeom prst="rect">
             <a:avLst/>
@@ -3553,6 +3661,332 @@
           </a:bodyPr>
           <a:lstStyle/>
           <a:p>
+            <a:pPr algn="ctr">
+              <a:spcAft>
+                <a:spcPts val="300"/>
+              </a:spcAft>
+            </a:pPr>
+            <a:r>
+              <a:rPr sz="2500" b="1">
+                <a:solidFill>
+                  <a:srgbClr val="1F8784"/>
+                </a:solidFill>
+                <a:latin typeface="Aptos"/>
+              </a:rPr>
+              <a:t>86,868</a:t>
+            </a:r>
+          </a:p>
+        </p:txBody>
+      </p:sp>
+      <p:sp>
+        <p:nvSpPr>
+          <p:cNvPr id="6" name="TextBox 5"/>
+          <p:cNvSpPr txBox="1"/>
+          <p:nvPr/>
+        </p:nvSpPr>
+        <p:spPr>
+          <a:xfrm>
+            <a:off x="1024128" y="2057400"/>
+            <a:ext cx="2706624" cy="384048"/>
+          </a:xfrm>
+          <a:prstGeom prst="rect">
+            <a:avLst/>
+          </a:prstGeom>
+          <a:noFill/>
+        </p:spPr>
+        <p:txBody>
+          <a:bodyPr wrap="square" lIns="36576" tIns="27432" rIns="36576" bIns="27432" anchor="t">
+            <a:spAutoFit/>
+          </a:bodyPr>
+          <a:lstStyle/>
+          <a:p>
+            <a:pPr algn="ctr">
+              <a:spcAft>
+                <a:spcPts val="300"/>
+              </a:spcAft>
+            </a:pPr>
+            <a:r>
+              <a:rPr sz="1100" b="1">
+                <a:solidFill>
+                  <a:srgbClr val="162744"/>
+                </a:solidFill>
+                <a:latin typeface="Aptos"/>
+              </a:rPr>
+              <a:t>Predicted test buildings</a:t>
+            </a:r>
+          </a:p>
+        </p:txBody>
+      </p:sp>
+      <p:sp>
+        <p:nvSpPr>
+          <p:cNvPr id="7" name="Rounded Rectangle 6"/>
+          <p:cNvSpPr/>
+          <p:nvPr/>
+        </p:nvSpPr>
+        <p:spPr>
+          <a:xfrm>
+            <a:off x="4617720" y="1463040"/>
+            <a:ext cx="2926080" cy="1325880"/>
+          </a:xfrm>
+          <a:prstGeom prst="roundRect">
+            <a:avLst/>
+          </a:prstGeom>
+          <a:solidFill>
+            <a:srgbClr val="EEF4F9"/>
+          </a:solidFill>
+          <a:ln>
+            <a:solidFill>
+              <a:srgbClr val="2B6499"/>
+            </a:solidFill>
+          </a:ln>
+        </p:spPr>
+        <p:style>
+          <a:lnRef idx="1">
+            <a:schemeClr val="accent1"/>
+          </a:lnRef>
+          <a:fillRef idx="3">
+            <a:schemeClr val="accent1"/>
+          </a:fillRef>
+          <a:effectRef idx="2">
+            <a:schemeClr val="accent1"/>
+          </a:effectRef>
+          <a:fontRef idx="minor">
+            <a:schemeClr val="lt1"/>
+          </a:fontRef>
+        </p:style>
+        <p:txBody>
+          <a:bodyPr rtlCol="0" anchor="ctr"/>
+          <a:lstStyle/>
+          <a:p>
+            <a:pPr algn="ctr"/>
+            <a:endParaRPr/>
+          </a:p>
+        </p:txBody>
+      </p:sp>
+      <p:sp>
+        <p:nvSpPr>
+          <p:cNvPr id="8" name="TextBox 7"/>
+          <p:cNvSpPr txBox="1"/>
+          <p:nvPr/>
+        </p:nvSpPr>
+        <p:spPr>
+          <a:xfrm>
+            <a:off x="4727448" y="1554480"/>
+            <a:ext cx="2706624" cy="438912"/>
+          </a:xfrm>
+          <a:prstGeom prst="rect">
+            <a:avLst/>
+          </a:prstGeom>
+          <a:noFill/>
+        </p:spPr>
+        <p:txBody>
+          <a:bodyPr wrap="square" lIns="36576" tIns="27432" rIns="36576" bIns="27432" anchor="t">
+            <a:spAutoFit/>
+          </a:bodyPr>
+          <a:lstStyle/>
+          <a:p>
+            <a:pPr algn="ctr">
+              <a:spcAft>
+                <a:spcPts val="300"/>
+              </a:spcAft>
+            </a:pPr>
+            <a:r>
+              <a:rPr sz="2500" b="1">
+                <a:solidFill>
+                  <a:srgbClr val="2B6499"/>
+                </a:solidFill>
+                <a:latin typeface="Aptos"/>
+              </a:rPr>
+              <a:t>2 columns</a:t>
+            </a:r>
+          </a:p>
+        </p:txBody>
+      </p:sp>
+      <p:sp>
+        <p:nvSpPr>
+          <p:cNvPr id="9" name="TextBox 8"/>
+          <p:cNvSpPr txBox="1"/>
+          <p:nvPr/>
+        </p:nvSpPr>
+        <p:spPr>
+          <a:xfrm>
+            <a:off x="4727448" y="2057400"/>
+            <a:ext cx="2706624" cy="384048"/>
+          </a:xfrm>
+          <a:prstGeom prst="rect">
+            <a:avLst/>
+          </a:prstGeom>
+          <a:noFill/>
+        </p:spPr>
+        <p:txBody>
+          <a:bodyPr wrap="square" lIns="36576" tIns="27432" rIns="36576" bIns="27432" anchor="t">
+            <a:spAutoFit/>
+          </a:bodyPr>
+          <a:lstStyle/>
+          <a:p>
+            <a:pPr algn="ctr">
+              <a:spcAft>
+                <a:spcPts val="300"/>
+              </a:spcAft>
+            </a:pPr>
+            <a:r>
+              <a:rPr sz="1100" b="1">
+                <a:solidFill>
+                  <a:srgbClr val="162744"/>
+                </a:solidFill>
+                <a:latin typeface="Aptos"/>
+              </a:rPr>
+              <a:t>building_id + damage_grade</a:t>
+            </a:r>
+          </a:p>
+        </p:txBody>
+      </p:sp>
+      <p:sp>
+        <p:nvSpPr>
+          <p:cNvPr id="10" name="Rounded Rectangle 9"/>
+          <p:cNvSpPr/>
+          <p:nvPr/>
+        </p:nvSpPr>
+        <p:spPr>
+          <a:xfrm>
+            <a:off x="8321040" y="1463040"/>
+            <a:ext cx="2926080" cy="1325880"/>
+          </a:xfrm>
+          <a:prstGeom prst="roundRect">
+            <a:avLst/>
+          </a:prstGeom>
+          <a:solidFill>
+            <a:srgbClr val="EEF4F9"/>
+          </a:solidFill>
+          <a:ln>
+            <a:solidFill>
+              <a:srgbClr val="1F8784"/>
+            </a:solidFill>
+          </a:ln>
+        </p:spPr>
+        <p:style>
+          <a:lnRef idx="1">
+            <a:schemeClr val="accent1"/>
+          </a:lnRef>
+          <a:fillRef idx="3">
+            <a:schemeClr val="accent1"/>
+          </a:fillRef>
+          <a:effectRef idx="2">
+            <a:schemeClr val="accent1"/>
+          </a:effectRef>
+          <a:fontRef idx="minor">
+            <a:schemeClr val="lt1"/>
+          </a:fontRef>
+        </p:style>
+        <p:txBody>
+          <a:bodyPr rtlCol="0" anchor="ctr"/>
+          <a:lstStyle/>
+          <a:p>
+            <a:pPr algn="ctr"/>
+            <a:endParaRPr/>
+          </a:p>
+        </p:txBody>
+      </p:sp>
+      <p:sp>
+        <p:nvSpPr>
+          <p:cNvPr id="11" name="TextBox 10"/>
+          <p:cNvSpPr txBox="1"/>
+          <p:nvPr/>
+        </p:nvSpPr>
+        <p:spPr>
+          <a:xfrm>
+            <a:off x="8430767" y="1554480"/>
+            <a:ext cx="2706624" cy="438912"/>
+          </a:xfrm>
+          <a:prstGeom prst="rect">
+            <a:avLst/>
+          </a:prstGeom>
+          <a:noFill/>
+        </p:spPr>
+        <p:txBody>
+          <a:bodyPr wrap="square" lIns="36576" tIns="27432" rIns="36576" bIns="27432" anchor="t">
+            <a:spAutoFit/>
+          </a:bodyPr>
+          <a:lstStyle/>
+          <a:p>
+            <a:pPr algn="ctr">
+              <a:spcAft>
+                <a:spcPts val="300"/>
+              </a:spcAft>
+            </a:pPr>
+            <a:r>
+              <a:rPr sz="2500" b="1">
+                <a:solidFill>
+                  <a:srgbClr val="1F8784"/>
+                </a:solidFill>
+                <a:latin typeface="Aptos"/>
+              </a:rPr>
+              <a:t>CSV</a:t>
+            </a:r>
+          </a:p>
+        </p:txBody>
+      </p:sp>
+      <p:sp>
+        <p:nvSpPr>
+          <p:cNvPr id="12" name="TextBox 11"/>
+          <p:cNvSpPr txBox="1"/>
+          <p:nvPr/>
+        </p:nvSpPr>
+        <p:spPr>
+          <a:xfrm>
+            <a:off x="8430767" y="2057400"/>
+            <a:ext cx="2706624" cy="384048"/>
+          </a:xfrm>
+          <a:prstGeom prst="rect">
+            <a:avLst/>
+          </a:prstGeom>
+          <a:noFill/>
+        </p:spPr>
+        <p:txBody>
+          <a:bodyPr wrap="square" lIns="36576" tIns="27432" rIns="36576" bIns="27432" anchor="t">
+            <a:spAutoFit/>
+          </a:bodyPr>
+          <a:lstStyle/>
+          <a:p>
+            <a:pPr algn="ctr">
+              <a:spcAft>
+                <a:spcPts val="300"/>
+              </a:spcAft>
+            </a:pPr>
+            <a:r>
+              <a:rPr sz="1100" b="1">
+                <a:solidFill>
+                  <a:srgbClr val="162744"/>
+                </a:solidFill>
+                <a:latin typeface="Aptos"/>
+              </a:rPr>
+              <a:t>nepal_earthquake_submission.csv</a:t>
+            </a:r>
+          </a:p>
+        </p:txBody>
+      </p:sp>
+      <p:sp>
+        <p:nvSpPr>
+          <p:cNvPr id="13" name="TextBox 12"/>
+          <p:cNvSpPr txBox="1"/>
+          <p:nvPr/>
+        </p:nvSpPr>
+        <p:spPr>
+          <a:xfrm>
+            <a:off x="914400" y="3337560"/>
+            <a:ext cx="4754880" cy="411480"/>
+          </a:xfrm>
+          <a:prstGeom prst="rect">
+            <a:avLst/>
+          </a:prstGeom>
+          <a:noFill/>
+        </p:spPr>
+        <p:txBody>
+          <a:bodyPr wrap="square" lIns="36576" tIns="27432" rIns="36576" bIns="27432" anchor="t">
+            <a:spAutoFit/>
+          </a:bodyPr>
+          <a:lstStyle/>
+          <a:p>
             <a:pPr algn="l">
               <a:spcAft>
                 <a:spcPts val="300"/>
@@ -3565,21 +3999,21 @@
                 </a:solidFill>
                 <a:latin typeface="Aptos"/>
               </a:rPr>
-              <a:t>CONCLUSIONS</a:t>
-            </a:r>
-          </a:p>
-        </p:txBody>
-      </p:sp>
-      <p:sp>
-        <p:nvSpPr>
-          <p:cNvPr id="5" name="TextBox 4"/>
-          <p:cNvSpPr txBox="1"/>
-          <p:nvPr/>
-        </p:nvSpPr>
-        <p:spPr>
-          <a:xfrm>
-            <a:off x="822960" y="1783080"/>
-            <a:ext cx="4937760" cy="3566160"/>
+              <a:t>PREDICTED CLASS COUNTS</a:t>
+            </a:r>
+          </a:p>
+        </p:txBody>
+      </p:sp>
+      <p:sp>
+        <p:nvSpPr>
+          <p:cNvPr id="14" name="TextBox 13"/>
+          <p:cNvSpPr txBox="1"/>
+          <p:nvPr/>
+        </p:nvSpPr>
+        <p:spPr>
+          <a:xfrm>
+            <a:off x="914400" y="3749039"/>
+            <a:ext cx="4389120" cy="1554480"/>
           </a:xfrm>
           <a:prstGeom prst="rect">
             <a:avLst/>
@@ -3594,9 +4028,9 @@
           <a:p>
             <a:pPr>
               <a:spcAft>
-                <a:spcPts val="1000"/>
-              </a:spcAft>
-              <a:defRPr sz="1500">
+                <a:spcPts val="700"/>
+              </a:spcAft>
+              <a:defRPr sz="1600">
                 <a:solidFill>
                   <a:srgbClr val="28313C"/>
                 </a:solidFill>
@@ -3604,15 +4038,15 @@
               </a:defRPr>
             </a:pPr>
             <a:r>
-              <a:t>Baseline Random Forest achieved 73.19% validation accuracy.</a:t>
+              <a:t>Grade 1: 6,545 (7.54%)</a:t>
             </a:r>
           </a:p>
           <a:p>
             <a:pPr>
               <a:spcAft>
-                <a:spcPts val="1000"/>
-              </a:spcAft>
-              <a:defRPr sz="1500">
+                <a:spcPts val="700"/>
+              </a:spcAft>
+              <a:defRPr sz="1600">
                 <a:solidFill>
                   <a:srgbClr val="28313C"/>
                 </a:solidFill>
@@ -3620,15 +4054,15 @@
               </a:defRPr>
             </a:pPr>
             <a:r>
-              <a:t>Macro F1 of 0.6801 reflects uneven performance across classes.</a:t>
+              <a:t>Grade 2: 55,332 (63.69%)</a:t>
             </a:r>
           </a:p>
           <a:p>
             <a:pPr>
               <a:spcAft>
-                <a:spcPts val="1000"/>
-              </a:spcAft>
-              <a:defRPr sz="1500">
+                <a:spcPts val="700"/>
+              </a:spcAft>
+              <a:defRPr sz="1600">
                 <a:solidFill>
                   <a:srgbClr val="28313C"/>
                 </a:solidFill>
@@ -3636,156 +4070,100 @@
               </a:defRPr>
             </a:pPr>
             <a:r>
-              <a:t>Geographic IDs, age and area percentage ranked highly in feature importance.</a:t>
-            </a:r>
-          </a:p>
-          <a:p>
-            <a:pPr>
-              <a:spcAft>
-                <a:spcPts val="1000"/>
-              </a:spcAft>
-              <a:defRPr sz="1500">
-                <a:solidFill>
-                  <a:srgbClr val="28313C"/>
-                </a:solidFill>
-                <a:latin typeface="Aptos"/>
-              </a:defRPr>
-            </a:pPr>
-            <a:r>
-              <a:t>Test predictions were exported successfully.</a:t>
-            </a:r>
-          </a:p>
-        </p:txBody>
-      </p:sp>
-      <p:sp>
-        <p:nvSpPr>
-          <p:cNvPr id="6" name="TextBox 5"/>
-          <p:cNvSpPr txBox="1"/>
-          <p:nvPr/>
-        </p:nvSpPr>
-        <p:spPr>
-          <a:xfrm>
-            <a:off x="6217920" y="1417320"/>
-            <a:ext cx="4937760" cy="365760"/>
-          </a:xfrm>
-          <a:prstGeom prst="rect">
-            <a:avLst/>
-          </a:prstGeom>
-          <a:noFill/>
-        </p:spPr>
-        <p:txBody>
-          <a:bodyPr wrap="square" lIns="36576" tIns="27432" rIns="36576" bIns="27432" anchor="t">
-            <a:spAutoFit/>
-          </a:bodyPr>
-          <a:lstStyle/>
-          <a:p>
-            <a:pPr algn="l">
+              <a:t>Grade 3: 24,991 (28.77%)</a:t>
+            </a:r>
+          </a:p>
+        </p:txBody>
+      </p:sp>
+      <p:sp>
+        <p:nvSpPr>
+          <p:cNvPr id="15" name="Rounded Rectangle 14"/>
+          <p:cNvSpPr/>
+          <p:nvPr/>
+        </p:nvSpPr>
+        <p:spPr>
+          <a:xfrm>
+            <a:off x="5943600" y="3383280"/>
+            <a:ext cx="4846320" cy="1508760"/>
+          </a:xfrm>
+          <a:prstGeom prst="roundRect">
+            <a:avLst/>
+          </a:prstGeom>
+          <a:solidFill>
+            <a:srgbClr val="EEF4F9"/>
+          </a:solidFill>
+          <a:ln>
+            <a:solidFill>
+              <a:srgbClr val="2B6499"/>
+            </a:solidFill>
+          </a:ln>
+        </p:spPr>
+        <p:style>
+          <a:lnRef idx="1">
+            <a:schemeClr val="accent1"/>
+          </a:lnRef>
+          <a:fillRef idx="3">
+            <a:schemeClr val="accent1"/>
+          </a:fillRef>
+          <a:effectRef idx="2">
+            <a:schemeClr val="accent1"/>
+          </a:effectRef>
+          <a:fontRef idx="minor">
+            <a:schemeClr val="lt1"/>
+          </a:fontRef>
+        </p:style>
+        <p:txBody>
+          <a:bodyPr rtlCol="0" anchor="ctr"/>
+          <a:lstStyle/>
+          <a:p>
+            <a:pPr algn="ctr"/>
+            <a:endParaRPr/>
+          </a:p>
+        </p:txBody>
+      </p:sp>
+      <p:sp>
+        <p:nvSpPr>
+          <p:cNvPr id="16" name="TextBox 15"/>
+          <p:cNvSpPr txBox="1"/>
+          <p:nvPr/>
+        </p:nvSpPr>
+        <p:spPr>
+          <a:xfrm>
+            <a:off x="6217920" y="3657600"/>
+            <a:ext cx="4297680" cy="914400"/>
+          </a:xfrm>
+          <a:prstGeom prst="rect">
+            <a:avLst/>
+          </a:prstGeom>
+          <a:noFill/>
+        </p:spPr>
+        <p:txBody>
+          <a:bodyPr wrap="square" lIns="36576" tIns="27432" rIns="36576" bIns="27432" anchor="ctr">
+            <a:spAutoFit/>
+          </a:bodyPr>
+          <a:lstStyle/>
+          <a:p>
+            <a:pPr algn="ctr">
               <a:spcAft>
                 <a:spcPts val="300"/>
               </a:spcAft>
             </a:pPr>
             <a:r>
-              <a:rPr sz="1400" b="1">
-                <a:solidFill>
-                  <a:srgbClr val="1F8784"/>
+              <a:rPr sz="1500" b="1">
+                <a:solidFill>
+                  <a:srgbClr val="162744"/>
                 </a:solidFill>
                 <a:latin typeface="Aptos"/>
               </a:rPr>
-              <a:t>LIMITATIONS / NEXT STEPS</a:t>
-            </a:r>
-          </a:p>
-        </p:txBody>
-      </p:sp>
-      <p:sp>
-        <p:nvSpPr>
-          <p:cNvPr id="7" name="TextBox 6"/>
-          <p:cNvSpPr txBox="1"/>
-          <p:nvPr/>
-        </p:nvSpPr>
-        <p:spPr>
-          <a:xfrm>
-            <a:off x="6217920" y="1783080"/>
-            <a:ext cx="5029200" cy="3566160"/>
-          </a:xfrm>
-          <a:prstGeom prst="rect">
-            <a:avLst/>
-          </a:prstGeom>
-          <a:noFill/>
-        </p:spPr>
-        <p:txBody>
-          <a:bodyPr wrap="square" lIns="73152" tIns="27432" rIns="45720">
-            <a:spAutoFit/>
-          </a:bodyPr>
-          <a:lstStyle/>
-          <a:p>
-            <a:pPr>
-              <a:spcAft>
-                <a:spcPts val="1000"/>
-              </a:spcAft>
-              <a:defRPr sz="1500">
-                <a:solidFill>
-                  <a:srgbClr val="28313C"/>
-                </a:solidFill>
-                <a:latin typeface="Aptos"/>
-              </a:defRPr>
-            </a:pPr>
-            <a:r>
-              <a:t>Class imbalance and confusion between adjacent grades.</a:t>
-            </a:r>
-          </a:p>
-          <a:p>
-            <a:pPr>
-              <a:spcAft>
-                <a:spcPts val="1000"/>
-              </a:spcAft>
-              <a:defRPr sz="1500">
-                <a:solidFill>
-                  <a:srgbClr val="28313C"/>
-                </a:solidFill>
-                <a:latin typeface="Aptos"/>
-              </a:defRPr>
-            </a:pPr>
-            <a:r>
-              <a:t>Unusually high recorded ages require careful interpretation.</a:t>
-            </a:r>
-          </a:p>
-          <a:p>
-            <a:pPr>
-              <a:spcAft>
-                <a:spcPts val="1000"/>
-              </a:spcAft>
-              <a:defRPr sz="1500">
-                <a:solidFill>
-                  <a:srgbClr val="28313C"/>
-                </a:solidFill>
-                <a:latin typeface="Aptos"/>
-              </a:defRPr>
-            </a:pPr>
-            <a:r>
-              <a:t>Impurity-based importance is not causal.</a:t>
-            </a:r>
-          </a:p>
-          <a:p>
-            <a:pPr>
-              <a:spcAft>
-                <a:spcPts val="1000"/>
-              </a:spcAft>
-              <a:defRPr sz="1500">
-                <a:solidFill>
-                  <a:srgbClr val="28313C"/>
-                </a:solidFill>
-                <a:latin typeface="Aptos"/>
-              </a:defRPr>
-            </a:pPr>
-            <a:r>
-              <a:t>Future work: class weighting, controlled tuning and permutation importance.</a:t>
-            </a:r>
-          </a:p>
-        </p:txBody>
-      </p:sp>
-      <p:sp>
-        <p:nvSpPr>
-          <p:cNvPr id="8" name="TextBox 7"/>
+              <a:t>Output: /kaggle/working/nepal_earthquake_submission.csv
+Test labels unavailable; test accuracy unknown.</a:t>
+            </a:r>
+          </a:p>
+        </p:txBody>
+      </p:sp>
+      <p:sp>
+        <p:nvSpPr>
+          <p:cNvPr id="17" name="TextBox 16"/>
           <p:cNvSpPr txBox="1"/>
           <p:nvPr/>
         </p:nvSpPr>
@@ -3824,7 +4202,7 @@
       </p:sp>
       <p:sp>
         <p:nvSpPr>
-          <p:cNvPr id="9" name="TextBox 8"/>
+          <p:cNvPr id="18" name="TextBox 17"/>
           <p:cNvSpPr txBox="1"/>
           <p:nvPr/>
         </p:nvSpPr>
@@ -3856,7 +4234,7 @@
                 </a:solidFill>
                 <a:latin typeface="Aptos"/>
               </a:rPr>
-              <a:t>10</a:t>
+              <a:t>9</a:t>
             </a:r>
           </a:p>
         </p:txBody>
@@ -3869,7 +4247,448 @@
 </p:sld>
 </file>
 
-<file path=ppt/slides/slide11.xml><?xml version="1.0" encoding="utf-8"?>
+<file path=ppt/slides/slide12.xml><?xml version="1.0" encoding="utf-8"?>
+<p:sld xmlns:a="http://schemas.openxmlformats.org/drawingml/2006/main" xmlns:r="http://schemas.openxmlformats.org/officeDocument/2006/relationships" xmlns:p="http://schemas.openxmlformats.org/presentationml/2006/main">
+  <p:cSld>
+    <p:bg>
+      <p:bgPr>
+        <a:solidFill>
+          <a:srgbClr val="FFFFFF"/>
+        </a:solidFill>
+        <a:effectLst/>
+      </p:bgPr>
+    </p:bg>
+    <p:spTree>
+      <p:nvGrpSpPr>
+        <p:cNvPr id="1" name=""/>
+        <p:cNvGrpSpPr/>
+        <p:nvPr/>
+      </p:nvGrpSpPr>
+      <p:grpSpPr>
+        <a:xfrm>
+          <a:off x="0" y="0"/>
+          <a:ext cx="0" cy="0"/>
+          <a:chOff x="0" y="0"/>
+          <a:chExt cx="0" cy="0"/>
+        </a:xfrm>
+      </p:grpSpPr>
+      <p:sp>
+        <p:nvSpPr>
+          <p:cNvPr id="2" name="TextBox 1"/>
+          <p:cNvSpPr txBox="1"/>
+          <p:nvPr/>
+        </p:nvSpPr>
+        <p:spPr>
+          <a:xfrm>
+            <a:off x="594360" y="320040"/>
+            <a:ext cx="10972800" cy="502920"/>
+          </a:xfrm>
+          <a:prstGeom prst="rect">
+            <a:avLst/>
+          </a:prstGeom>
+          <a:noFill/>
+        </p:spPr>
+        <p:txBody>
+          <a:bodyPr wrap="square" lIns="36576" tIns="27432" rIns="36576" bIns="27432" anchor="t">
+            <a:spAutoFit/>
+          </a:bodyPr>
+          <a:lstStyle/>
+          <a:p>
+            <a:pPr algn="l">
+              <a:spcAft>
+                <a:spcPts val="300"/>
+              </a:spcAft>
+            </a:pPr>
+            <a:r>
+              <a:rPr sz="2800" b="1">
+                <a:solidFill>
+                  <a:srgbClr val="162744"/>
+                </a:solidFill>
+                <a:latin typeface="Aptos"/>
+              </a:rPr>
+              <a:t>Conclusion, Limitations &amp; Future Work</a:t>
+            </a:r>
+          </a:p>
+        </p:txBody>
+      </p:sp>
+      <p:sp>
+        <p:nvSpPr>
+          <p:cNvPr id="3" name="TextBox 2"/>
+          <p:cNvSpPr txBox="1"/>
+          <p:nvPr/>
+        </p:nvSpPr>
+        <p:spPr>
+          <a:xfrm>
+            <a:off x="621792" y="868680"/>
+            <a:ext cx="10789920" cy="365760"/>
+          </a:xfrm>
+          <a:prstGeom prst="rect">
+            <a:avLst/>
+          </a:prstGeom>
+          <a:noFill/>
+        </p:spPr>
+        <p:txBody>
+          <a:bodyPr wrap="square" lIns="36576" tIns="27432" rIns="36576" bIns="27432" anchor="t">
+            <a:spAutoFit/>
+          </a:bodyPr>
+          <a:lstStyle/>
+          <a:p>
+            <a:pPr algn="l">
+              <a:spcAft>
+                <a:spcPts val="300"/>
+              </a:spcAft>
+            </a:pPr>
+            <a:r>
+              <a:rPr sz="1200" b="0">
+                <a:solidFill>
+                  <a:srgbClr val="5F6B78"/>
+                </a:solidFill>
+                <a:latin typeface="Aptos"/>
+              </a:rPr>
+              <a:t>What the experiments show and what could be improved.</a:t>
+            </a:r>
+          </a:p>
+        </p:txBody>
+      </p:sp>
+      <p:sp>
+        <p:nvSpPr>
+          <p:cNvPr id="4" name="TextBox 3"/>
+          <p:cNvSpPr txBox="1"/>
+          <p:nvPr/>
+        </p:nvSpPr>
+        <p:spPr>
+          <a:xfrm>
+            <a:off x="822960" y="1417320"/>
+            <a:ext cx="4937760" cy="365760"/>
+          </a:xfrm>
+          <a:prstGeom prst="rect">
+            <a:avLst/>
+          </a:prstGeom>
+          <a:noFill/>
+        </p:spPr>
+        <p:txBody>
+          <a:bodyPr wrap="square" lIns="36576" tIns="27432" rIns="36576" bIns="27432" anchor="t">
+            <a:spAutoFit/>
+          </a:bodyPr>
+          <a:lstStyle/>
+          <a:p>
+            <a:pPr algn="l">
+              <a:spcAft>
+                <a:spcPts val="300"/>
+              </a:spcAft>
+            </a:pPr>
+            <a:r>
+              <a:rPr sz="1400" b="1">
+                <a:solidFill>
+                  <a:srgbClr val="1F8784"/>
+                </a:solidFill>
+                <a:latin typeface="Aptos"/>
+              </a:rPr>
+              <a:t>CONCLUSIONS</a:t>
+            </a:r>
+          </a:p>
+        </p:txBody>
+      </p:sp>
+      <p:sp>
+        <p:nvSpPr>
+          <p:cNvPr id="5" name="TextBox 4"/>
+          <p:cNvSpPr txBox="1"/>
+          <p:nvPr/>
+        </p:nvSpPr>
+        <p:spPr>
+          <a:xfrm>
+            <a:off x="822960" y="1783080"/>
+            <a:ext cx="4937760" cy="3566160"/>
+          </a:xfrm>
+          <a:prstGeom prst="rect">
+            <a:avLst/>
+          </a:prstGeom>
+          <a:noFill/>
+        </p:spPr>
+        <p:txBody>
+          <a:bodyPr wrap="square" lIns="73152" tIns="27432" rIns="45720">
+            <a:spAutoFit/>
+          </a:bodyPr>
+          <a:lstStyle/>
+          <a:p>
+            <a:pPr>
+              <a:spcAft>
+                <a:spcPts val="1000"/>
+              </a:spcAft>
+              <a:defRPr sz="1500">
+                <a:solidFill>
+                  <a:srgbClr val="28313C"/>
+                </a:solidFill>
+                <a:latin typeface="Aptos"/>
+              </a:defRPr>
+            </a:pPr>
+            <a:r>
+              <a:t>Baseline Random Forest achieved 73.19% validation accuracy.</a:t>
+            </a:r>
+          </a:p>
+          <a:p>
+            <a:pPr>
+              <a:spcAft>
+                <a:spcPts val="1000"/>
+              </a:spcAft>
+              <a:defRPr sz="1500">
+                <a:solidFill>
+                  <a:srgbClr val="28313C"/>
+                </a:solidFill>
+                <a:latin typeface="Aptos"/>
+              </a:defRPr>
+            </a:pPr>
+            <a:r>
+              <a:t>Macro F1 of 0.6801 reflects uneven performance across classes.</a:t>
+            </a:r>
+          </a:p>
+          <a:p>
+            <a:pPr>
+              <a:spcAft>
+                <a:spcPts val="1000"/>
+              </a:spcAft>
+              <a:defRPr sz="1500">
+                <a:solidFill>
+                  <a:srgbClr val="28313C"/>
+                </a:solidFill>
+                <a:latin typeface="Aptos"/>
+              </a:defRPr>
+            </a:pPr>
+            <a:r>
+              <a:t>Geographic IDs, age and area percentage ranked highly in feature importance.</a:t>
+            </a:r>
+          </a:p>
+          <a:p>
+            <a:pPr>
+              <a:spcAft>
+                <a:spcPts val="1000"/>
+              </a:spcAft>
+              <a:defRPr sz="1500">
+                <a:solidFill>
+                  <a:srgbClr val="28313C"/>
+                </a:solidFill>
+                <a:latin typeface="Aptos"/>
+              </a:defRPr>
+            </a:pPr>
+            <a:r>
+              <a:t>Test predictions were exported successfully.</a:t>
+            </a:r>
+          </a:p>
+        </p:txBody>
+      </p:sp>
+      <p:sp>
+        <p:nvSpPr>
+          <p:cNvPr id="6" name="TextBox 5"/>
+          <p:cNvSpPr txBox="1"/>
+          <p:nvPr/>
+        </p:nvSpPr>
+        <p:spPr>
+          <a:xfrm>
+            <a:off x="6217920" y="1417320"/>
+            <a:ext cx="4937760" cy="365760"/>
+          </a:xfrm>
+          <a:prstGeom prst="rect">
+            <a:avLst/>
+          </a:prstGeom>
+          <a:noFill/>
+        </p:spPr>
+        <p:txBody>
+          <a:bodyPr wrap="square" lIns="36576" tIns="27432" rIns="36576" bIns="27432" anchor="t">
+            <a:spAutoFit/>
+          </a:bodyPr>
+          <a:lstStyle/>
+          <a:p>
+            <a:pPr algn="l">
+              <a:spcAft>
+                <a:spcPts val="300"/>
+              </a:spcAft>
+            </a:pPr>
+            <a:r>
+              <a:rPr sz="1400" b="1">
+                <a:solidFill>
+                  <a:srgbClr val="1F8784"/>
+                </a:solidFill>
+                <a:latin typeface="Aptos"/>
+              </a:rPr>
+              <a:t>LIMITATIONS / NEXT STEPS</a:t>
+            </a:r>
+          </a:p>
+        </p:txBody>
+      </p:sp>
+      <p:sp>
+        <p:nvSpPr>
+          <p:cNvPr id="7" name="TextBox 6"/>
+          <p:cNvSpPr txBox="1"/>
+          <p:nvPr/>
+        </p:nvSpPr>
+        <p:spPr>
+          <a:xfrm>
+            <a:off x="6217920" y="1783080"/>
+            <a:ext cx="5029200" cy="3566160"/>
+          </a:xfrm>
+          <a:prstGeom prst="rect">
+            <a:avLst/>
+          </a:prstGeom>
+          <a:noFill/>
+        </p:spPr>
+        <p:txBody>
+          <a:bodyPr wrap="square" lIns="73152" tIns="27432" rIns="45720">
+            <a:spAutoFit/>
+          </a:bodyPr>
+          <a:lstStyle/>
+          <a:p>
+            <a:pPr>
+              <a:spcAft>
+                <a:spcPts val="1000"/>
+              </a:spcAft>
+              <a:defRPr sz="1500">
+                <a:solidFill>
+                  <a:srgbClr val="28313C"/>
+                </a:solidFill>
+                <a:latin typeface="Aptos"/>
+              </a:defRPr>
+            </a:pPr>
+            <a:r>
+              <a:t>Class imbalance and confusion between adjacent grades.</a:t>
+            </a:r>
+          </a:p>
+          <a:p>
+            <a:pPr>
+              <a:spcAft>
+                <a:spcPts val="1000"/>
+              </a:spcAft>
+              <a:defRPr sz="1500">
+                <a:solidFill>
+                  <a:srgbClr val="28313C"/>
+                </a:solidFill>
+                <a:latin typeface="Aptos"/>
+              </a:defRPr>
+            </a:pPr>
+            <a:r>
+              <a:t>Unusually high recorded ages require careful interpretation.</a:t>
+            </a:r>
+          </a:p>
+          <a:p>
+            <a:pPr>
+              <a:spcAft>
+                <a:spcPts val="1000"/>
+              </a:spcAft>
+              <a:defRPr sz="1500">
+                <a:solidFill>
+                  <a:srgbClr val="28313C"/>
+                </a:solidFill>
+                <a:latin typeface="Aptos"/>
+              </a:defRPr>
+            </a:pPr>
+            <a:r>
+              <a:t>Impurity-based importance is not causal.</a:t>
+            </a:r>
+          </a:p>
+          <a:p>
+            <a:pPr>
+              <a:spcAft>
+                <a:spcPts val="1000"/>
+              </a:spcAft>
+              <a:defRPr sz="1500">
+                <a:solidFill>
+                  <a:srgbClr val="28313C"/>
+                </a:solidFill>
+                <a:latin typeface="Aptos"/>
+              </a:defRPr>
+            </a:pPr>
+            <a:r>
+              <a:t>Future work: class weighting, controlled tuning and permutation importance.</a:t>
+            </a:r>
+          </a:p>
+        </p:txBody>
+      </p:sp>
+      <p:sp>
+        <p:nvSpPr>
+          <p:cNvPr id="8" name="TextBox 7"/>
+          <p:cNvSpPr txBox="1"/>
+          <p:nvPr/>
+        </p:nvSpPr>
+        <p:spPr>
+          <a:xfrm>
+            <a:off x="594360" y="6510528"/>
+            <a:ext cx="9875520" cy="182880"/>
+          </a:xfrm>
+          <a:prstGeom prst="rect">
+            <a:avLst/>
+          </a:prstGeom>
+          <a:noFill/>
+        </p:spPr>
+        <p:txBody>
+          <a:bodyPr wrap="square" lIns="36576" tIns="27432" rIns="36576" bIns="27432" anchor="t">
+            <a:spAutoFit/>
+          </a:bodyPr>
+          <a:lstStyle/>
+          <a:p>
+            <a:pPr algn="l">
+              <a:spcAft>
+                <a:spcPts val="300"/>
+              </a:spcAft>
+            </a:pPr>
+            <a:r>
+              <a:rPr sz="800" b="0">
+                <a:solidFill>
+                  <a:srgbClr val="5F6B78"/>
+                </a:solidFill>
+                <a:latin typeface="Aptos"/>
+              </a:rPr>
+              <a:t>NEPAL EARTHQUAKE • BUILDING DAMAGE PREDICTION</a:t>
+            </a:r>
+          </a:p>
+        </p:txBody>
+      </p:sp>
+      <p:sp>
+        <p:nvSpPr>
+          <p:cNvPr id="9" name="TextBox 8"/>
+          <p:cNvSpPr txBox="1"/>
+          <p:nvPr/>
+        </p:nvSpPr>
+        <p:spPr>
+          <a:xfrm>
+            <a:off x="10972800" y="6492240"/>
+            <a:ext cx="548640" cy="182880"/>
+          </a:xfrm>
+          <a:prstGeom prst="rect">
+            <a:avLst/>
+          </a:prstGeom>
+          <a:noFill/>
+        </p:spPr>
+        <p:txBody>
+          <a:bodyPr wrap="square" lIns="36576" tIns="27432" rIns="36576" bIns="27432" anchor="t">
+            <a:spAutoFit/>
+          </a:bodyPr>
+          <a:lstStyle/>
+          <a:p>
+            <a:pPr algn="r">
+              <a:spcAft>
+                <a:spcPts val="300"/>
+              </a:spcAft>
+            </a:pPr>
+            <a:r>
+              <a:rPr sz="800" b="0">
+                <a:solidFill>
+                  <a:srgbClr val="5F6B78"/>
+                </a:solidFill>
+                <a:latin typeface="Aptos"/>
+              </a:rPr>
+              <a:t>10</a:t>
+            </a:r>
+          </a:p>
+        </p:txBody>
+      </p:sp>
+    </p:spTree>
+  </p:cSld>
+  <p:clrMapOvr>
+    <a:masterClrMapping/>
+  </p:clrMapOvr>
+</p:sld>
+</file>
+
+<file path=ppt/slides/slide13.xml><?xml version="1.0" encoding="utf-8"?>
 <p:sld xmlns:a="http://schemas.openxmlformats.org/drawingml/2006/main" xmlns:r="http://schemas.openxmlformats.org/officeDocument/2006/relationships" xmlns:p="http://schemas.openxmlformats.org/presentationml/2006/main">
   <p:cSld>
     <p:bg>
@@ -4605,7 +5424,7 @@
               </a:spcAft>
             </a:pPr>
             <a:r>
-              <a:rPr sz="2500" b="1">
+              <a:rPr sz="2500" b="1" dirty="0">
                 <a:solidFill>
                   <a:srgbClr val="1F8784"/>
                 </a:solidFill>
@@ -5035,7 +5854,7 @@
         </p:nvSpPr>
         <p:spPr>
           <a:xfrm>
-            <a:off x="822960" y="3154680"/>
+            <a:off x="731520" y="3503516"/>
             <a:ext cx="5212080" cy="411480"/>
           </a:xfrm>
           <a:prstGeom prst="rect">
@@ -5074,7 +5893,7 @@
         </p:nvSpPr>
         <p:spPr>
           <a:xfrm>
-            <a:off x="822960" y="3566160"/>
+            <a:off x="731520" y="3870639"/>
             <a:ext cx="5212080" cy="2103120"/>
           </a:xfrm>
           <a:prstGeom prst="rect">
@@ -5100,6 +5919,7 @@
               </a:defRPr>
             </a:pPr>
             <a:r>
+              <a:rPr dirty="0"/>
               <a:t>train_values.csv — training features</a:t>
             </a:r>
           </a:p>
@@ -5116,7 +5936,16 @@
               </a:defRPr>
             </a:pPr>
             <a:r>
-              <a:t>train_labels.csv — damage_grade target</a:t>
+              <a:rPr dirty="0"/>
+              <a:t>train_labels.csv — </a:t>
+            </a:r>
+            <a:r>
+              <a:rPr dirty="0" err="1"/>
+              <a:t>damage_grade</a:t>
+            </a:r>
+            <a:r>
+              <a:rPr dirty="0"/>
+              <a:t> target</a:t>
             </a:r>
           </a:p>
           <a:p>
@@ -5132,6 +5961,7 @@
               </a:defRPr>
             </a:pPr>
             <a:r>
+              <a:rPr dirty="0"/>
               <a:t>test_values.csv — buildings to predict</a:t>
             </a:r>
           </a:p>
@@ -5148,6 +5978,7 @@
               </a:defRPr>
             </a:pPr>
             <a:r>
+              <a:rPr dirty="0"/>
               <a:t>submission_format.csv — output template</a:t>
             </a:r>
           </a:p>
@@ -5161,7 +5992,7 @@
         </p:nvSpPr>
         <p:spPr>
           <a:xfrm>
-            <a:off x="6400800" y="3154680"/>
+            <a:off x="5299587" y="3552664"/>
             <a:ext cx="4937760" cy="411480"/>
           </a:xfrm>
           <a:prstGeom prst="rect">
@@ -5181,7 +6012,7 @@
               </a:spcAft>
             </a:pPr>
             <a:r>
-              <a:rPr sz="1400" b="1">
+              <a:rPr sz="1400" b="1" dirty="0">
                 <a:solidFill>
                   <a:srgbClr val="1F8784"/>
                 </a:solidFill>
@@ -5200,7 +6031,7 @@
         </p:nvSpPr>
         <p:spPr>
           <a:xfrm>
-            <a:off x="6400800" y="3566160"/>
+            <a:off x="5299586" y="3977640"/>
             <a:ext cx="4754880" cy="2286000"/>
           </a:xfrm>
           <a:prstGeom prst="rect">
@@ -5226,6 +6057,7 @@
               </a:defRPr>
             </a:pPr>
             <a:r>
+              <a:rPr dirty="0"/>
               <a:t>Grade 1: 25,124 (9.64%)</a:t>
             </a:r>
           </a:p>
@@ -5242,6 +6074,7 @@
               </a:defRPr>
             </a:pPr>
             <a:r>
+              <a:rPr dirty="0"/>
               <a:t>Grade 2: 148,259 (56.89%)</a:t>
             </a:r>
           </a:p>
@@ -5258,6 +6091,7 @@
               </a:defRPr>
             </a:pPr>
             <a:r>
+              <a:rPr dirty="0"/>
               <a:t>Grade 3: 87,218 (33.47%)</a:t>
             </a:r>
           </a:p>
@@ -5341,6 +6175,36 @@
           </a:p>
         </p:txBody>
       </p:sp>
+      <p:pic>
+        <p:nvPicPr>
+          <p:cNvPr id="23" name="Picture 22">
+            <a:extLst>
+              <a:ext uri="{FF2B5EF4-FFF2-40B4-BE49-F238E27FC236}">
+                <a16:creationId xmlns:a16="http://schemas.microsoft.com/office/drawing/2014/main" id="{F917B55D-BE23-3C1A-4041-3B4863943F8A}"/>
+              </a:ext>
+            </a:extLst>
+          </p:cNvPr>
+          <p:cNvPicPr>
+            <a:picLocks noChangeAspect="1"/>
+          </p:cNvPicPr>
+          <p:nvPr/>
+        </p:nvPicPr>
+        <p:blipFill>
+          <a:blip r:embed="rId2"/>
+          <a:stretch>
+            <a:fillRect/>
+          </a:stretch>
+        </p:blipFill>
+        <p:spPr>
+          <a:xfrm>
+            <a:off x="8402647" y="3467385"/>
+            <a:ext cx="3303639" cy="1869984"/>
+          </a:xfrm>
+          <a:prstGeom prst="rect">
+            <a:avLst/>
+          </a:prstGeom>
+        </p:spPr>
+      </p:pic>
     </p:spTree>
   </p:cSld>
   <p:clrMapOvr>
@@ -5460,8 +6324,8 @@
         </p:nvSpPr>
         <p:spPr>
           <a:xfrm>
-            <a:off x="822960" y="1417320"/>
-            <a:ext cx="5303520" cy="4297680"/>
+            <a:off x="621792" y="1514340"/>
+            <a:ext cx="7079717" cy="2115451"/>
           </a:xfrm>
           <a:prstGeom prst="rect">
             <a:avLst/>
@@ -5486,7 +6350,16 @@
               </a:defRPr>
             </a:pPr>
             <a:r>
-              <a:t>Training labels aligned with features using building_id.</a:t>
+              <a:rPr dirty="0"/>
+              <a:t>Training labels aligned with features using </a:t>
+            </a:r>
+            <a:r>
+              <a:rPr dirty="0" err="1"/>
+              <a:t>building_id</a:t>
+            </a:r>
+            <a:r>
+              <a:rPr dirty="0"/>
+              <a:t>.</a:t>
             </a:r>
           </a:p>
           <a:p>
@@ -5502,6 +6375,7 @@
               </a:defRPr>
             </a:pPr>
             <a:r>
+              <a:rPr dirty="0"/>
               <a:t>No missing feature values or missing labels were found.</a:t>
             </a:r>
           </a:p>
@@ -5518,6 +6392,7 @@
               </a:defRPr>
             </a:pPr>
             <a:r>
+              <a:rPr dirty="0"/>
               <a:t>16,191 duplicate feature rows were retained; different buildings can share attributes.</a:t>
             </a:r>
           </a:p>
@@ -5534,6 +6409,7 @@
               </a:defRPr>
             </a:pPr>
             <a:r>
+              <a:rPr dirty="0"/>
               <a:t>Foundation type was compared with damage-grade proportions.</a:t>
             </a:r>
           </a:p>
@@ -5550,294 +6426,8 @@
               </a:defRPr>
             </a:pPr>
             <a:r>
+              <a:rPr dirty="0"/>
               <a:t>Building age included unusual values, including age = 995.</a:t>
-            </a:r>
-          </a:p>
-        </p:txBody>
-      </p:sp>
-      <p:sp>
-        <p:nvSpPr>
-          <p:cNvPr id="5" name="Rounded Rectangle 4"/>
-          <p:cNvSpPr/>
-          <p:nvPr/>
-        </p:nvSpPr>
-        <p:spPr>
-          <a:xfrm>
-            <a:off x="6400800" y="1645920"/>
-            <a:ext cx="2286000" cy="2148840"/>
-          </a:xfrm>
-          <a:prstGeom prst="roundRect">
-            <a:avLst/>
-          </a:prstGeom>
-          <a:solidFill>
-            <a:srgbClr val="EEF4F9"/>
-          </a:solidFill>
-          <a:ln>
-            <a:solidFill>
-              <a:srgbClr val="1F8784"/>
-            </a:solidFill>
-          </a:ln>
-        </p:spPr>
-        <p:style>
-          <a:lnRef idx="1">
-            <a:schemeClr val="accent1"/>
-          </a:lnRef>
-          <a:fillRef idx="3">
-            <a:schemeClr val="accent1"/>
-          </a:fillRef>
-          <a:effectRef idx="2">
-            <a:schemeClr val="accent1"/>
-          </a:effectRef>
-          <a:fontRef idx="minor">
-            <a:schemeClr val="lt1"/>
-          </a:fontRef>
-        </p:style>
-        <p:txBody>
-          <a:bodyPr rtlCol="0" anchor="ctr"/>
-          <a:lstStyle/>
-          <a:p>
-            <a:pPr algn="ctr"/>
-            <a:endParaRPr/>
-          </a:p>
-        </p:txBody>
-      </p:sp>
-      <p:sp>
-        <p:nvSpPr>
-          <p:cNvPr id="6" name="TextBox 5"/>
-          <p:cNvSpPr txBox="1"/>
-          <p:nvPr/>
-        </p:nvSpPr>
-        <p:spPr>
-          <a:xfrm>
-            <a:off x="6537960" y="2148840"/>
-            <a:ext cx="2011680" cy="411480"/>
-          </a:xfrm>
-          <a:prstGeom prst="rect">
-            <a:avLst/>
-          </a:prstGeom>
-          <a:noFill/>
-        </p:spPr>
-        <p:txBody>
-          <a:bodyPr wrap="square" lIns="36576" tIns="27432" rIns="36576" bIns="27432" anchor="t">
-            <a:spAutoFit/>
-          </a:bodyPr>
-          <a:lstStyle/>
-          <a:p>
-            <a:pPr algn="ctr">
-              <a:spcAft>
-                <a:spcPts val="300"/>
-              </a:spcAft>
-            </a:pPr>
-            <a:r>
-              <a:rPr sz="1200" b="1">
-                <a:solidFill>
-                  <a:srgbClr val="1F8784"/>
-                </a:solidFill>
-                <a:latin typeface="Aptos"/>
-              </a:rPr>
-              <a:t>INSERT SCREENSHOT</a:t>
-            </a:r>
-          </a:p>
-        </p:txBody>
-      </p:sp>
-      <p:sp>
-        <p:nvSpPr>
-          <p:cNvPr id="7" name="TextBox 6"/>
-          <p:cNvSpPr txBox="1"/>
-          <p:nvPr/>
-        </p:nvSpPr>
-        <p:spPr>
-          <a:xfrm>
-            <a:off x="6537960" y="2743200"/>
-            <a:ext cx="2011680" cy="640080"/>
-          </a:xfrm>
-          <a:prstGeom prst="rect">
-            <a:avLst/>
-          </a:prstGeom>
-          <a:noFill/>
-        </p:spPr>
-        <p:txBody>
-          <a:bodyPr wrap="square" lIns="36576" tIns="27432" rIns="36576" bIns="27432" anchor="t">
-            <a:spAutoFit/>
-          </a:bodyPr>
-          <a:lstStyle/>
-          <a:p>
-            <a:pPr algn="ctr">
-              <a:spcAft>
-                <a:spcPts val="300"/>
-              </a:spcAft>
-            </a:pPr>
-            <a:r>
-              <a:rPr sz="1200" b="0">
-                <a:solidFill>
-                  <a:srgbClr val="162744"/>
-                </a:solidFill>
-                <a:latin typeface="Aptos"/>
-              </a:rPr>
-              <a:t>Damage grade distribution</a:t>
-            </a:r>
-          </a:p>
-        </p:txBody>
-      </p:sp>
-      <p:sp>
-        <p:nvSpPr>
-          <p:cNvPr id="8" name="Rounded Rectangle 7"/>
-          <p:cNvSpPr/>
-          <p:nvPr/>
-        </p:nvSpPr>
-        <p:spPr>
-          <a:xfrm>
-            <a:off x="9006840" y="1645920"/>
-            <a:ext cx="2286000" cy="2148840"/>
-          </a:xfrm>
-          <a:prstGeom prst="roundRect">
-            <a:avLst/>
-          </a:prstGeom>
-          <a:solidFill>
-            <a:srgbClr val="EEF4F9"/>
-          </a:solidFill>
-          <a:ln>
-            <a:solidFill>
-              <a:srgbClr val="1F8784"/>
-            </a:solidFill>
-          </a:ln>
-        </p:spPr>
-        <p:style>
-          <a:lnRef idx="1">
-            <a:schemeClr val="accent1"/>
-          </a:lnRef>
-          <a:fillRef idx="3">
-            <a:schemeClr val="accent1"/>
-          </a:fillRef>
-          <a:effectRef idx="2">
-            <a:schemeClr val="accent1"/>
-          </a:effectRef>
-          <a:fontRef idx="minor">
-            <a:schemeClr val="lt1"/>
-          </a:fontRef>
-        </p:style>
-        <p:txBody>
-          <a:bodyPr rtlCol="0" anchor="ctr"/>
-          <a:lstStyle/>
-          <a:p>
-            <a:pPr algn="ctr"/>
-            <a:endParaRPr/>
-          </a:p>
-        </p:txBody>
-      </p:sp>
-      <p:sp>
-        <p:nvSpPr>
-          <p:cNvPr id="9" name="TextBox 8"/>
-          <p:cNvSpPr txBox="1"/>
-          <p:nvPr/>
-        </p:nvSpPr>
-        <p:spPr>
-          <a:xfrm>
-            <a:off x="9144000" y="2148840"/>
-            <a:ext cx="2011680" cy="411480"/>
-          </a:xfrm>
-          <a:prstGeom prst="rect">
-            <a:avLst/>
-          </a:prstGeom>
-          <a:noFill/>
-        </p:spPr>
-        <p:txBody>
-          <a:bodyPr wrap="square" lIns="36576" tIns="27432" rIns="36576" bIns="27432" anchor="t">
-            <a:spAutoFit/>
-          </a:bodyPr>
-          <a:lstStyle/>
-          <a:p>
-            <a:pPr algn="ctr">
-              <a:spcAft>
-                <a:spcPts val="300"/>
-              </a:spcAft>
-            </a:pPr>
-            <a:r>
-              <a:rPr sz="1200" b="1">
-                <a:solidFill>
-                  <a:srgbClr val="1F8784"/>
-                </a:solidFill>
-                <a:latin typeface="Aptos"/>
-              </a:rPr>
-              <a:t>INSERT SCREENSHOT</a:t>
-            </a:r>
-          </a:p>
-        </p:txBody>
-      </p:sp>
-      <p:sp>
-        <p:nvSpPr>
-          <p:cNvPr id="10" name="TextBox 9"/>
-          <p:cNvSpPr txBox="1"/>
-          <p:nvPr/>
-        </p:nvSpPr>
-        <p:spPr>
-          <a:xfrm>
-            <a:off x="9144000" y="2743200"/>
-            <a:ext cx="2011680" cy="640080"/>
-          </a:xfrm>
-          <a:prstGeom prst="rect">
-            <a:avLst/>
-          </a:prstGeom>
-          <a:noFill/>
-        </p:spPr>
-        <p:txBody>
-          <a:bodyPr wrap="square" lIns="36576" tIns="27432" rIns="36576" bIns="27432" anchor="t">
-            <a:spAutoFit/>
-          </a:bodyPr>
-          <a:lstStyle/>
-          <a:p>
-            <a:pPr algn="ctr">
-              <a:spcAft>
-                <a:spcPts val="300"/>
-              </a:spcAft>
-            </a:pPr>
-            <a:r>
-              <a:rPr sz="1200" b="0">
-                <a:solidFill>
-                  <a:srgbClr val="162744"/>
-                </a:solidFill>
-                <a:latin typeface="Aptos"/>
-              </a:rPr>
-              <a:t>Foundation type / damage</a:t>
-            </a:r>
-          </a:p>
-        </p:txBody>
-      </p:sp>
-      <p:sp>
-        <p:nvSpPr>
-          <p:cNvPr id="11" name="TextBox 10"/>
-          <p:cNvSpPr txBox="1"/>
-          <p:nvPr/>
-        </p:nvSpPr>
-        <p:spPr>
-          <a:xfrm>
-            <a:off x="6400800" y="4251960"/>
-            <a:ext cx="4846320" cy="1005840"/>
-          </a:xfrm>
-          <a:prstGeom prst="rect">
-            <a:avLst/>
-          </a:prstGeom>
-          <a:noFill/>
-        </p:spPr>
-        <p:txBody>
-          <a:bodyPr wrap="square" lIns="36576" tIns="27432" rIns="36576" bIns="27432" anchor="t">
-            <a:spAutoFit/>
-          </a:bodyPr>
-          <a:lstStyle/>
-          <a:p>
-            <a:pPr algn="l">
-              <a:spcAft>
-                <a:spcPts val="300"/>
-              </a:spcAft>
-            </a:pPr>
-            <a:r>
-              <a:rPr sz="1300" b="0">
-                <a:solidFill>
-                  <a:srgbClr val="5F6B78"/>
-                </a:solidFill>
-                <a:latin typeface="Aptos"/>
-              </a:rPr>
-              <a:t>Replace placeholders with screenshots from your Kaggle notebook if required.</a:t>
             </a:r>
           </a:p>
         </p:txBody>
@@ -5920,6 +6510,66 @@
           </a:p>
         </p:txBody>
       </p:sp>
+      <p:pic>
+        <p:nvPicPr>
+          <p:cNvPr id="15" name="Picture 14">
+            <a:extLst>
+              <a:ext uri="{FF2B5EF4-FFF2-40B4-BE49-F238E27FC236}">
+                <a16:creationId xmlns:a16="http://schemas.microsoft.com/office/drawing/2014/main" id="{246304A7-221D-C578-393B-5CE3584AE48C}"/>
+              </a:ext>
+            </a:extLst>
+          </p:cNvPr>
+          <p:cNvPicPr>
+            <a:picLocks noChangeAspect="1"/>
+          </p:cNvPicPr>
+          <p:nvPr/>
+        </p:nvPicPr>
+        <p:blipFill>
+          <a:blip r:embed="rId2"/>
+          <a:stretch>
+            <a:fillRect/>
+          </a:stretch>
+        </p:blipFill>
+        <p:spPr>
+          <a:xfrm>
+            <a:off x="5085638" y="4001131"/>
+            <a:ext cx="6576318" cy="1988189"/>
+          </a:xfrm>
+          <a:prstGeom prst="rect">
+            <a:avLst/>
+          </a:prstGeom>
+        </p:spPr>
+      </p:pic>
+      <p:pic>
+        <p:nvPicPr>
+          <p:cNvPr id="17" name="Picture 16">
+            <a:extLst>
+              <a:ext uri="{FF2B5EF4-FFF2-40B4-BE49-F238E27FC236}">
+                <a16:creationId xmlns:a16="http://schemas.microsoft.com/office/drawing/2014/main" id="{FA9E7796-A8A9-C824-FFA3-1A289D3AD199}"/>
+              </a:ext>
+            </a:extLst>
+          </p:cNvPr>
+          <p:cNvPicPr>
+            <a:picLocks noChangeAspect="1"/>
+          </p:cNvPicPr>
+          <p:nvPr/>
+        </p:nvPicPr>
+        <p:blipFill>
+          <a:blip r:embed="rId3"/>
+          <a:stretch>
+            <a:fillRect/>
+          </a:stretch>
+        </p:blipFill>
+        <p:spPr>
+          <a:xfrm>
+            <a:off x="8055077" y="1790423"/>
+            <a:ext cx="3466363" cy="1959248"/>
+          </a:xfrm>
+          <a:prstGeom prst="rect">
+            <a:avLst/>
+          </a:prstGeom>
+        </p:spPr>
+      </p:pic>
     </p:spTree>
   </p:cSld>
   <p:clrMapOvr>
@@ -7383,7 +8033,7 @@
         </p:nvSpPr>
         <p:spPr>
           <a:xfrm>
-            <a:off x="5943600" y="3474720"/>
+            <a:off x="3383280" y="3598164"/>
             <a:ext cx="4754880" cy="1645920"/>
           </a:xfrm>
           <a:prstGeom prst="roundRect">
@@ -7429,7 +8079,7 @@
         </p:nvSpPr>
         <p:spPr>
           <a:xfrm>
-            <a:off x="6217920" y="3749039"/>
+            <a:off x="3657600" y="3858768"/>
             <a:ext cx="4206240" cy="1097280"/>
           </a:xfrm>
           <a:prstGeom prst="rect">
@@ -7449,7 +8099,7 @@
               </a:spcAft>
             </a:pPr>
             <a:r>
-              <a:rPr sz="1700" b="1">
+              <a:rPr sz="1700" b="1" dirty="0">
                 <a:solidFill>
                   <a:srgbClr val="162744"/>
                 </a:solidFill>
@@ -7539,6 +8189,36 @@
           </a:p>
         </p:txBody>
       </p:sp>
+      <p:pic>
+        <p:nvPicPr>
+          <p:cNvPr id="20" name="Picture 19">
+            <a:extLst>
+              <a:ext uri="{FF2B5EF4-FFF2-40B4-BE49-F238E27FC236}">
+                <a16:creationId xmlns:a16="http://schemas.microsoft.com/office/drawing/2014/main" id="{158D6052-FD4F-8772-5C90-6C1441FB1F6E}"/>
+              </a:ext>
+            </a:extLst>
+          </p:cNvPr>
+          <p:cNvPicPr>
+            <a:picLocks noChangeAspect="1"/>
+          </p:cNvPicPr>
+          <p:nvPr/>
+        </p:nvPicPr>
+        <p:blipFill>
+          <a:blip r:embed="rId2"/>
+          <a:stretch>
+            <a:fillRect/>
+          </a:stretch>
+        </p:blipFill>
+        <p:spPr>
+          <a:xfrm>
+            <a:off x="8743968" y="3552441"/>
+            <a:ext cx="2756824" cy="2377445"/>
+          </a:xfrm>
+          <a:prstGeom prst="rect">
+            <a:avLst/>
+          </a:prstGeom>
+        </p:spPr>
+      </p:pic>
     </p:spTree>
   </p:cSld>
   <p:clrMapOvr>
@@ -9289,6 +9969,36 @@
           </a:p>
         </p:txBody>
       </p:sp>
+      <p:pic>
+        <p:nvPicPr>
+          <p:cNvPr id="28" name="Picture 27">
+            <a:extLst>
+              <a:ext uri="{FF2B5EF4-FFF2-40B4-BE49-F238E27FC236}">
+                <a16:creationId xmlns:a16="http://schemas.microsoft.com/office/drawing/2014/main" id="{A1E4A497-DFAD-73D6-2A89-BE1094BF160F}"/>
+              </a:ext>
+            </a:extLst>
+          </p:cNvPr>
+          <p:cNvPicPr>
+            <a:picLocks noChangeAspect="1"/>
+          </p:cNvPicPr>
+          <p:nvPr/>
+        </p:nvPicPr>
+        <p:blipFill>
+          <a:blip r:embed="rId2"/>
+          <a:stretch>
+            <a:fillRect/>
+          </a:stretch>
+        </p:blipFill>
+        <p:spPr>
+          <a:xfrm>
+            <a:off x="10687665" y="5624218"/>
+            <a:ext cx="983225" cy="617530"/>
+          </a:xfrm>
+          <a:prstGeom prst="rect">
+            <a:avLst/>
+          </a:prstGeom>
+        </p:spPr>
+      </p:pic>
     </p:spTree>
   </p:cSld>
   <p:clrMapOvr>
@@ -9300,14 +10010,6 @@
 <file path=ppt/slides/slide9.xml><?xml version="1.0" encoding="utf-8"?>
 <p:sld xmlns:a="http://schemas.openxmlformats.org/drawingml/2006/main" xmlns:r="http://schemas.openxmlformats.org/officeDocument/2006/relationships" xmlns:p="http://schemas.openxmlformats.org/presentationml/2006/main">
   <p:cSld>
-    <p:bg>
-      <p:bgPr>
-        <a:solidFill>
-          <a:srgbClr val="FFFFFF"/>
-        </a:solidFill>
-        <a:effectLst/>
-      </p:bgPr>
-    </p:bg>
     <p:spTree>
       <p:nvGrpSpPr>
         <p:cNvPr id="1" name=""/>
@@ -9322,731 +10024,42 @@
           <a:chExt cx="0" cy="0"/>
         </a:xfrm>
       </p:grpSpPr>
-      <p:sp>
-        <p:nvSpPr>
-          <p:cNvPr id="2" name="TextBox 1"/>
-          <p:cNvSpPr txBox="1"/>
-          <p:nvPr/>
-        </p:nvSpPr>
-        <p:spPr>
-          <a:xfrm>
-            <a:off x="594360" y="320040"/>
-            <a:ext cx="10972800" cy="502920"/>
-          </a:xfrm>
-          <a:prstGeom prst="rect">
-            <a:avLst/>
-          </a:prstGeom>
-          <a:noFill/>
-        </p:spPr>
-        <p:txBody>
-          <a:bodyPr wrap="square" lIns="36576" tIns="27432" rIns="36576" bIns="27432" anchor="t">
-            <a:spAutoFit/>
-          </a:bodyPr>
-          <a:lstStyle/>
-          <a:p>
-            <a:pPr algn="l">
-              <a:spcAft>
-                <a:spcPts val="300"/>
-              </a:spcAft>
-            </a:pPr>
-            <a:r>
-              <a:rPr sz="2800" b="1">
-                <a:solidFill>
-                  <a:srgbClr val="162744"/>
-                </a:solidFill>
-                <a:latin typeface="Aptos"/>
-              </a:rPr>
-              <a:t>Final Test Predictions</a:t>
-            </a:r>
-          </a:p>
-        </p:txBody>
-      </p:sp>
-      <p:sp>
-        <p:nvSpPr>
-          <p:cNvPr id="3" name="TextBox 2"/>
-          <p:cNvSpPr txBox="1"/>
-          <p:nvPr/>
-        </p:nvSpPr>
-        <p:spPr>
-          <a:xfrm>
-            <a:off x="621792" y="868680"/>
-            <a:ext cx="10789920" cy="365760"/>
-          </a:xfrm>
-          <a:prstGeom prst="rect">
-            <a:avLst/>
-          </a:prstGeom>
-          <a:noFill/>
-        </p:spPr>
-        <p:txBody>
-          <a:bodyPr wrap="square" lIns="36576" tIns="27432" rIns="36576" bIns="27432" anchor="t">
-            <a:spAutoFit/>
-          </a:bodyPr>
-          <a:lstStyle/>
-          <a:p>
-            <a:pPr algn="l">
-              <a:spcAft>
-                <a:spcPts val="300"/>
-              </a:spcAft>
-            </a:pPr>
-            <a:r>
-              <a:rPr sz="1200" b="0">
-                <a:solidFill>
-                  <a:srgbClr val="5F6B78"/>
-                </a:solidFill>
-                <a:latin typeface="Aptos"/>
-              </a:rPr>
-              <a:t>Prediction export completed using the fitted baseline Random Forest.</a:t>
-            </a:r>
-          </a:p>
-        </p:txBody>
-      </p:sp>
-      <p:sp>
-        <p:nvSpPr>
-          <p:cNvPr id="4" name="Rounded Rectangle 3"/>
-          <p:cNvSpPr/>
-          <p:nvPr/>
-        </p:nvSpPr>
-        <p:spPr>
-          <a:xfrm>
-            <a:off x="914400" y="1463040"/>
-            <a:ext cx="2926080" cy="1325880"/>
-          </a:xfrm>
-          <a:prstGeom prst="roundRect">
-            <a:avLst/>
-          </a:prstGeom>
-          <a:solidFill>
-            <a:srgbClr val="EEF4F9"/>
-          </a:solidFill>
-          <a:ln>
-            <a:solidFill>
-              <a:srgbClr val="1F8784"/>
-            </a:solidFill>
-          </a:ln>
-        </p:spPr>
-        <p:style>
-          <a:lnRef idx="1">
-            <a:schemeClr val="accent1"/>
-          </a:lnRef>
-          <a:fillRef idx="3">
-            <a:schemeClr val="accent1"/>
-          </a:fillRef>
-          <a:effectRef idx="2">
-            <a:schemeClr val="accent1"/>
-          </a:effectRef>
-          <a:fontRef idx="minor">
-            <a:schemeClr val="lt1"/>
-          </a:fontRef>
-        </p:style>
-        <p:txBody>
-          <a:bodyPr rtlCol="0" anchor="ctr"/>
-          <a:lstStyle/>
-          <a:p>
-            <a:pPr algn="ctr"/>
-            <a:endParaRPr/>
-          </a:p>
-        </p:txBody>
-      </p:sp>
-      <p:sp>
-        <p:nvSpPr>
-          <p:cNvPr id="5" name="TextBox 4"/>
-          <p:cNvSpPr txBox="1"/>
-          <p:nvPr/>
-        </p:nvSpPr>
-        <p:spPr>
-          <a:xfrm>
-            <a:off x="1024128" y="1554480"/>
-            <a:ext cx="2706624" cy="438912"/>
-          </a:xfrm>
-          <a:prstGeom prst="rect">
-            <a:avLst/>
-          </a:prstGeom>
-          <a:noFill/>
-        </p:spPr>
-        <p:txBody>
-          <a:bodyPr wrap="square" lIns="36576" tIns="27432" rIns="36576" bIns="27432" anchor="t">
-            <a:spAutoFit/>
-          </a:bodyPr>
-          <a:lstStyle/>
-          <a:p>
-            <a:pPr algn="ctr">
-              <a:spcAft>
-                <a:spcPts val="300"/>
-              </a:spcAft>
-            </a:pPr>
-            <a:r>
-              <a:rPr sz="2500" b="1">
-                <a:solidFill>
-                  <a:srgbClr val="1F8784"/>
-                </a:solidFill>
-                <a:latin typeface="Aptos"/>
-              </a:rPr>
-              <a:t>86,868</a:t>
-            </a:r>
-          </a:p>
-        </p:txBody>
-      </p:sp>
-      <p:sp>
-        <p:nvSpPr>
-          <p:cNvPr id="6" name="TextBox 5"/>
-          <p:cNvSpPr txBox="1"/>
-          <p:nvPr/>
-        </p:nvSpPr>
-        <p:spPr>
-          <a:xfrm>
-            <a:off x="1024128" y="2057400"/>
-            <a:ext cx="2706624" cy="384048"/>
-          </a:xfrm>
-          <a:prstGeom prst="rect">
-            <a:avLst/>
-          </a:prstGeom>
-          <a:noFill/>
-        </p:spPr>
-        <p:txBody>
-          <a:bodyPr wrap="square" lIns="36576" tIns="27432" rIns="36576" bIns="27432" anchor="t">
-            <a:spAutoFit/>
-          </a:bodyPr>
-          <a:lstStyle/>
-          <a:p>
-            <a:pPr algn="ctr">
-              <a:spcAft>
-                <a:spcPts val="300"/>
-              </a:spcAft>
-            </a:pPr>
-            <a:r>
-              <a:rPr sz="1100" b="1">
-                <a:solidFill>
-                  <a:srgbClr val="162744"/>
-                </a:solidFill>
-                <a:latin typeface="Aptos"/>
-              </a:rPr>
-              <a:t>Predicted test buildings</a:t>
-            </a:r>
-          </a:p>
-        </p:txBody>
-      </p:sp>
-      <p:sp>
-        <p:nvSpPr>
-          <p:cNvPr id="7" name="Rounded Rectangle 6"/>
-          <p:cNvSpPr/>
-          <p:nvPr/>
-        </p:nvSpPr>
-        <p:spPr>
-          <a:xfrm>
-            <a:off x="4617720" y="1463040"/>
-            <a:ext cx="2926080" cy="1325880"/>
-          </a:xfrm>
-          <a:prstGeom prst="roundRect">
-            <a:avLst/>
-          </a:prstGeom>
-          <a:solidFill>
-            <a:srgbClr val="EEF4F9"/>
-          </a:solidFill>
-          <a:ln>
-            <a:solidFill>
-              <a:srgbClr val="2B6499"/>
-            </a:solidFill>
-          </a:ln>
-        </p:spPr>
-        <p:style>
-          <a:lnRef idx="1">
-            <a:schemeClr val="accent1"/>
-          </a:lnRef>
-          <a:fillRef idx="3">
-            <a:schemeClr val="accent1"/>
-          </a:fillRef>
-          <a:effectRef idx="2">
-            <a:schemeClr val="accent1"/>
-          </a:effectRef>
-          <a:fontRef idx="minor">
-            <a:schemeClr val="lt1"/>
-          </a:fontRef>
-        </p:style>
-        <p:txBody>
-          <a:bodyPr rtlCol="0" anchor="ctr"/>
-          <a:lstStyle/>
-          <a:p>
-            <a:pPr algn="ctr"/>
-            <a:endParaRPr/>
-          </a:p>
-        </p:txBody>
-      </p:sp>
-      <p:sp>
-        <p:nvSpPr>
-          <p:cNvPr id="8" name="TextBox 7"/>
-          <p:cNvSpPr txBox="1"/>
-          <p:nvPr/>
-        </p:nvSpPr>
-        <p:spPr>
-          <a:xfrm>
-            <a:off x="4727448" y="1554480"/>
-            <a:ext cx="2706624" cy="438912"/>
-          </a:xfrm>
-          <a:prstGeom prst="rect">
-            <a:avLst/>
-          </a:prstGeom>
-          <a:noFill/>
-        </p:spPr>
-        <p:txBody>
-          <a:bodyPr wrap="square" lIns="36576" tIns="27432" rIns="36576" bIns="27432" anchor="t">
-            <a:spAutoFit/>
-          </a:bodyPr>
-          <a:lstStyle/>
-          <a:p>
-            <a:pPr algn="ctr">
-              <a:spcAft>
-                <a:spcPts val="300"/>
-              </a:spcAft>
-            </a:pPr>
-            <a:r>
-              <a:rPr sz="2500" b="1">
-                <a:solidFill>
-                  <a:srgbClr val="2B6499"/>
-                </a:solidFill>
-                <a:latin typeface="Aptos"/>
-              </a:rPr>
-              <a:t>2 columns</a:t>
-            </a:r>
-          </a:p>
-        </p:txBody>
-      </p:sp>
-      <p:sp>
-        <p:nvSpPr>
-          <p:cNvPr id="9" name="TextBox 8"/>
-          <p:cNvSpPr txBox="1"/>
-          <p:nvPr/>
-        </p:nvSpPr>
-        <p:spPr>
-          <a:xfrm>
-            <a:off x="4727448" y="2057400"/>
-            <a:ext cx="2706624" cy="384048"/>
-          </a:xfrm>
-          <a:prstGeom prst="rect">
-            <a:avLst/>
-          </a:prstGeom>
-          <a:noFill/>
-        </p:spPr>
-        <p:txBody>
-          <a:bodyPr wrap="square" lIns="36576" tIns="27432" rIns="36576" bIns="27432" anchor="t">
-            <a:spAutoFit/>
-          </a:bodyPr>
-          <a:lstStyle/>
-          <a:p>
-            <a:pPr algn="ctr">
-              <a:spcAft>
-                <a:spcPts val="300"/>
-              </a:spcAft>
-            </a:pPr>
-            <a:r>
-              <a:rPr sz="1100" b="1">
-                <a:solidFill>
-                  <a:srgbClr val="162744"/>
-                </a:solidFill>
-                <a:latin typeface="Aptos"/>
-              </a:rPr>
-              <a:t>building_id + damage_grade</a:t>
-            </a:r>
-          </a:p>
-        </p:txBody>
-      </p:sp>
-      <p:sp>
-        <p:nvSpPr>
-          <p:cNvPr id="10" name="Rounded Rectangle 9"/>
-          <p:cNvSpPr/>
-          <p:nvPr/>
-        </p:nvSpPr>
-        <p:spPr>
-          <a:xfrm>
-            <a:off x="8321040" y="1463040"/>
-            <a:ext cx="2926080" cy="1325880"/>
-          </a:xfrm>
-          <a:prstGeom prst="roundRect">
-            <a:avLst/>
-          </a:prstGeom>
-          <a:solidFill>
-            <a:srgbClr val="EEF4F9"/>
-          </a:solidFill>
-          <a:ln>
-            <a:solidFill>
-              <a:srgbClr val="1F8784"/>
-            </a:solidFill>
-          </a:ln>
-        </p:spPr>
-        <p:style>
-          <a:lnRef idx="1">
-            <a:schemeClr val="accent1"/>
-          </a:lnRef>
-          <a:fillRef idx="3">
-            <a:schemeClr val="accent1"/>
-          </a:fillRef>
-          <a:effectRef idx="2">
-            <a:schemeClr val="accent1"/>
-          </a:effectRef>
-          <a:fontRef idx="minor">
-            <a:schemeClr val="lt1"/>
-          </a:fontRef>
-        </p:style>
-        <p:txBody>
-          <a:bodyPr rtlCol="0" anchor="ctr"/>
-          <a:lstStyle/>
-          <a:p>
-            <a:pPr algn="ctr"/>
-            <a:endParaRPr/>
-          </a:p>
-        </p:txBody>
-      </p:sp>
-      <p:sp>
-        <p:nvSpPr>
-          <p:cNvPr id="11" name="TextBox 10"/>
-          <p:cNvSpPr txBox="1"/>
-          <p:nvPr/>
-        </p:nvSpPr>
-        <p:spPr>
-          <a:xfrm>
-            <a:off x="8430767" y="1554480"/>
-            <a:ext cx="2706624" cy="438912"/>
-          </a:xfrm>
-          <a:prstGeom prst="rect">
-            <a:avLst/>
-          </a:prstGeom>
-          <a:noFill/>
-        </p:spPr>
-        <p:txBody>
-          <a:bodyPr wrap="square" lIns="36576" tIns="27432" rIns="36576" bIns="27432" anchor="t">
-            <a:spAutoFit/>
-          </a:bodyPr>
-          <a:lstStyle/>
-          <a:p>
-            <a:pPr algn="ctr">
-              <a:spcAft>
-                <a:spcPts val="300"/>
-              </a:spcAft>
-            </a:pPr>
-            <a:r>
-              <a:rPr sz="2500" b="1">
-                <a:solidFill>
-                  <a:srgbClr val="1F8784"/>
-                </a:solidFill>
-                <a:latin typeface="Aptos"/>
-              </a:rPr>
-              <a:t>CSV</a:t>
-            </a:r>
-          </a:p>
-        </p:txBody>
-      </p:sp>
-      <p:sp>
-        <p:nvSpPr>
-          <p:cNvPr id="12" name="TextBox 11"/>
-          <p:cNvSpPr txBox="1"/>
-          <p:nvPr/>
-        </p:nvSpPr>
-        <p:spPr>
-          <a:xfrm>
-            <a:off x="8430767" y="2057400"/>
-            <a:ext cx="2706624" cy="384048"/>
-          </a:xfrm>
-          <a:prstGeom prst="rect">
-            <a:avLst/>
-          </a:prstGeom>
-          <a:noFill/>
-        </p:spPr>
-        <p:txBody>
-          <a:bodyPr wrap="square" lIns="36576" tIns="27432" rIns="36576" bIns="27432" anchor="t">
-            <a:spAutoFit/>
-          </a:bodyPr>
-          <a:lstStyle/>
-          <a:p>
-            <a:pPr algn="ctr">
-              <a:spcAft>
-                <a:spcPts val="300"/>
-              </a:spcAft>
-            </a:pPr>
-            <a:r>
-              <a:rPr sz="1100" b="1">
-                <a:solidFill>
-                  <a:srgbClr val="162744"/>
-                </a:solidFill>
-                <a:latin typeface="Aptos"/>
-              </a:rPr>
-              <a:t>nepal_earthquake_submission.csv</a:t>
-            </a:r>
-          </a:p>
-        </p:txBody>
-      </p:sp>
-      <p:sp>
-        <p:nvSpPr>
-          <p:cNvPr id="13" name="TextBox 12"/>
-          <p:cNvSpPr txBox="1"/>
-          <p:nvPr/>
-        </p:nvSpPr>
-        <p:spPr>
-          <a:xfrm>
-            <a:off x="914400" y="3337560"/>
-            <a:ext cx="4754880" cy="411480"/>
-          </a:xfrm>
-          <a:prstGeom prst="rect">
-            <a:avLst/>
-          </a:prstGeom>
-          <a:noFill/>
-        </p:spPr>
-        <p:txBody>
-          <a:bodyPr wrap="square" lIns="36576" tIns="27432" rIns="36576" bIns="27432" anchor="t">
-            <a:spAutoFit/>
-          </a:bodyPr>
-          <a:lstStyle/>
-          <a:p>
-            <a:pPr algn="l">
-              <a:spcAft>
-                <a:spcPts val="300"/>
-              </a:spcAft>
-            </a:pPr>
-            <a:r>
-              <a:rPr sz="1400" b="1">
-                <a:solidFill>
-                  <a:srgbClr val="1F8784"/>
-                </a:solidFill>
-                <a:latin typeface="Aptos"/>
-              </a:rPr>
-              <a:t>PREDICTED CLASS COUNTS</a:t>
-            </a:r>
-          </a:p>
-        </p:txBody>
-      </p:sp>
-      <p:sp>
-        <p:nvSpPr>
-          <p:cNvPr id="14" name="TextBox 13"/>
-          <p:cNvSpPr txBox="1"/>
-          <p:nvPr/>
-        </p:nvSpPr>
-        <p:spPr>
-          <a:xfrm>
-            <a:off x="914400" y="3749039"/>
-            <a:ext cx="4389120" cy="1554480"/>
-          </a:xfrm>
-          <a:prstGeom prst="rect">
-            <a:avLst/>
-          </a:prstGeom>
-          <a:noFill/>
-        </p:spPr>
-        <p:txBody>
-          <a:bodyPr wrap="square" lIns="73152" tIns="27432" rIns="45720">
-            <a:spAutoFit/>
-          </a:bodyPr>
-          <a:lstStyle/>
-          <a:p>
-            <a:pPr>
-              <a:spcAft>
-                <a:spcPts val="700"/>
-              </a:spcAft>
-              <a:defRPr sz="1600">
-                <a:solidFill>
-                  <a:srgbClr val="28313C"/>
-                </a:solidFill>
-                <a:latin typeface="Aptos"/>
-              </a:defRPr>
-            </a:pPr>
-            <a:r>
-              <a:t>Grade 1: 6,545 (7.54%)</a:t>
-            </a:r>
-          </a:p>
-          <a:p>
-            <a:pPr>
-              <a:spcAft>
-                <a:spcPts val="700"/>
-              </a:spcAft>
-              <a:defRPr sz="1600">
-                <a:solidFill>
-                  <a:srgbClr val="28313C"/>
-                </a:solidFill>
-                <a:latin typeface="Aptos"/>
-              </a:defRPr>
-            </a:pPr>
-            <a:r>
-              <a:t>Grade 2: 55,332 (63.69%)</a:t>
-            </a:r>
-          </a:p>
-          <a:p>
-            <a:pPr>
-              <a:spcAft>
-                <a:spcPts val="700"/>
-              </a:spcAft>
-              <a:defRPr sz="1600">
-                <a:solidFill>
-                  <a:srgbClr val="28313C"/>
-                </a:solidFill>
-                <a:latin typeface="Aptos"/>
-              </a:defRPr>
-            </a:pPr>
-            <a:r>
-              <a:t>Grade 3: 24,991 (28.77%)</a:t>
-            </a:r>
-          </a:p>
-        </p:txBody>
-      </p:sp>
-      <p:sp>
-        <p:nvSpPr>
-          <p:cNvPr id="15" name="Rounded Rectangle 14"/>
-          <p:cNvSpPr/>
-          <p:nvPr/>
-        </p:nvSpPr>
-        <p:spPr>
-          <a:xfrm>
-            <a:off x="5943600" y="3383280"/>
-            <a:ext cx="4846320" cy="1508760"/>
-          </a:xfrm>
-          <a:prstGeom prst="roundRect">
-            <a:avLst/>
-          </a:prstGeom>
-          <a:solidFill>
-            <a:srgbClr val="EEF4F9"/>
-          </a:solidFill>
-          <a:ln>
-            <a:solidFill>
-              <a:srgbClr val="2B6499"/>
-            </a:solidFill>
-          </a:ln>
-        </p:spPr>
-        <p:style>
-          <a:lnRef idx="1">
-            <a:schemeClr val="accent1"/>
-          </a:lnRef>
-          <a:fillRef idx="3">
-            <a:schemeClr val="accent1"/>
-          </a:fillRef>
-          <a:effectRef idx="2">
-            <a:schemeClr val="accent1"/>
-          </a:effectRef>
-          <a:fontRef idx="minor">
-            <a:schemeClr val="lt1"/>
-          </a:fontRef>
-        </p:style>
-        <p:txBody>
-          <a:bodyPr rtlCol="0" anchor="ctr"/>
-          <a:lstStyle/>
-          <a:p>
-            <a:pPr algn="ctr"/>
-            <a:endParaRPr/>
-          </a:p>
-        </p:txBody>
-      </p:sp>
-      <p:sp>
-        <p:nvSpPr>
-          <p:cNvPr id="16" name="TextBox 15"/>
-          <p:cNvSpPr txBox="1"/>
-          <p:nvPr/>
-        </p:nvSpPr>
-        <p:spPr>
-          <a:xfrm>
-            <a:off x="6217920" y="3657600"/>
-            <a:ext cx="4297680" cy="914400"/>
-          </a:xfrm>
-          <a:prstGeom prst="rect">
-            <a:avLst/>
-          </a:prstGeom>
-          <a:noFill/>
-        </p:spPr>
-        <p:txBody>
-          <a:bodyPr wrap="square" lIns="36576" tIns="27432" rIns="36576" bIns="27432" anchor="ctr">
-            <a:spAutoFit/>
-          </a:bodyPr>
-          <a:lstStyle/>
-          <a:p>
-            <a:pPr algn="ctr">
-              <a:spcAft>
-                <a:spcPts val="300"/>
-              </a:spcAft>
-            </a:pPr>
-            <a:r>
-              <a:rPr sz="1500" b="1">
-                <a:solidFill>
-                  <a:srgbClr val="162744"/>
-                </a:solidFill>
-                <a:latin typeface="Aptos"/>
-              </a:rPr>
-              <a:t>Output: /kaggle/working/nepal_earthquake_submission.csv
-Test labels unavailable; test accuracy unknown.</a:t>
-            </a:r>
-          </a:p>
-        </p:txBody>
-      </p:sp>
-      <p:sp>
-        <p:nvSpPr>
-          <p:cNvPr id="17" name="TextBox 16"/>
-          <p:cNvSpPr txBox="1"/>
-          <p:nvPr/>
-        </p:nvSpPr>
-        <p:spPr>
-          <a:xfrm>
-            <a:off x="594360" y="6510528"/>
-            <a:ext cx="9875520" cy="182880"/>
-          </a:xfrm>
-          <a:prstGeom prst="rect">
-            <a:avLst/>
-          </a:prstGeom>
-          <a:noFill/>
-        </p:spPr>
-        <p:txBody>
-          <a:bodyPr wrap="square" lIns="36576" tIns="27432" rIns="36576" bIns="27432" anchor="t">
-            <a:spAutoFit/>
-          </a:bodyPr>
-          <a:lstStyle/>
-          <a:p>
-            <a:pPr algn="l">
-              <a:spcAft>
-                <a:spcPts val="300"/>
-              </a:spcAft>
-            </a:pPr>
-            <a:r>
-              <a:rPr sz="800" b="0">
-                <a:solidFill>
-                  <a:srgbClr val="5F6B78"/>
-                </a:solidFill>
-                <a:latin typeface="Aptos"/>
-              </a:rPr>
-              <a:t>NEPAL EARTHQUAKE • BUILDING DAMAGE PREDICTION</a:t>
-            </a:r>
-          </a:p>
-        </p:txBody>
-      </p:sp>
-      <p:sp>
-        <p:nvSpPr>
-          <p:cNvPr id="18" name="TextBox 17"/>
-          <p:cNvSpPr txBox="1"/>
-          <p:nvPr/>
-        </p:nvSpPr>
-        <p:spPr>
-          <a:xfrm>
-            <a:off x="10972800" y="6492240"/>
-            <a:ext cx="548640" cy="182880"/>
-          </a:xfrm>
-          <a:prstGeom prst="rect">
-            <a:avLst/>
-          </a:prstGeom>
-          <a:noFill/>
-        </p:spPr>
-        <p:txBody>
-          <a:bodyPr wrap="square" lIns="36576" tIns="27432" rIns="36576" bIns="27432" anchor="t">
-            <a:spAutoFit/>
-          </a:bodyPr>
-          <a:lstStyle/>
-          <a:p>
-            <a:pPr algn="r">
-              <a:spcAft>
-                <a:spcPts val="300"/>
-              </a:spcAft>
-            </a:pPr>
-            <a:r>
-              <a:rPr sz="800" b="0">
-                <a:solidFill>
-                  <a:srgbClr val="5F6B78"/>
-                </a:solidFill>
-                <a:latin typeface="Aptos"/>
-              </a:rPr>
-              <a:t>9</a:t>
-            </a:r>
-          </a:p>
-        </p:txBody>
-      </p:sp>
+      <p:pic>
+        <p:nvPicPr>
+          <p:cNvPr id="3" name="Picture 2">
+            <a:extLst>
+              <a:ext uri="{FF2B5EF4-FFF2-40B4-BE49-F238E27FC236}">
+                <a16:creationId xmlns:a16="http://schemas.microsoft.com/office/drawing/2014/main" id="{450D2413-F999-C79F-7058-8FFDBCA1C97A}"/>
+              </a:ext>
+            </a:extLst>
+          </p:cNvPr>
+          <p:cNvPicPr>
+            <a:picLocks noChangeAspect="1"/>
+          </p:cNvPicPr>
+          <p:nvPr/>
+        </p:nvPicPr>
+        <p:blipFill>
+          <a:blip r:embed="rId2"/>
+          <a:stretch>
+            <a:fillRect/>
+          </a:stretch>
+        </p:blipFill>
+        <p:spPr>
+          <a:xfrm>
+            <a:off x="1032388" y="390666"/>
+            <a:ext cx="9910916" cy="6224707"/>
+          </a:xfrm>
+          <a:prstGeom prst="rect">
+            <a:avLst/>
+          </a:prstGeom>
+        </p:spPr>
+      </p:pic>
     </p:spTree>
+    <p:extLst>
+      <p:ext uri="{BB962C8B-B14F-4D97-AF65-F5344CB8AC3E}">
+        <p14:creationId xmlns:p14="http://schemas.microsoft.com/office/powerpoint/2010/main" val="2695760255"/>
+      </p:ext>
+    </p:extLst>
   </p:cSld>
   <p:clrMapOvr>
     <a:masterClrMapping/>
